--- a/pitch/commish-pitch.pptx
+++ b/pitch/commish-pitch.pptx
@@ -600,7 +600,7 @@
           <a:p>
             <a:r>
               <a:rPr lang="en-US" dirty="0"/>
-              <a:t>I'm Bryan Kwandou. I built Commish on my own: the program, the app in four languages and the tests, across five days of public commits. I also publish open-source tools for decks, writing and video editing. The code is the proof, and all of it is on GitHub. The next step is real campaigns.</a:t>
+              <a:t>I'm Bryan Kwandou. I've sold my own art on Objkt since 2022 and on Drip since 2024, and I earn through Shutterstock and Upwork, so every payout I get runs on someone else's schedule. I study informatics in Makassar and lead the Superteam campus club there. I built Commish's program, app and tests myself.</a:t>
             </a:r>
             <a:endParaRPr lang="en-US" dirty="0"/>
           </a:p>

--- a/pitch/commish-pitch.pptx
+++ b/pitch/commish-pitch.pptx
@@ -16,9 +16,10 @@
     <p:sldId id="264" r:id="rId10"/>
     <p:sldId id="265" r:id="rId11"/>
     <p:sldId id="266" r:id="rId12"/>
+    <p:sldId id="267" r:id="rId13"/>
   </p:sldIdLst>
   <p:notesMasterIdLst>
-    <p:notesMasterId r:id="rId13"/>
+    <p:notesMasterId r:id="rId14"/>
   </p:notesMasterIdLst>
   <p:sldSz cx="12192000" cy="6858000"/>
   <p:notesSz cx="6858000" cy="12192000"/>
@@ -600,7 +601,7 @@
           <a:p>
             <a:r>
               <a:rPr lang="en-US" dirty="0"/>
-              <a:t>I'm Bryan Kwandou. I've sold my own art on Objkt since 2022 and on Drip since 2024, and I earn through Shutterstock and Upwork, so every payout I get runs on someone else's schedule. I study informatics in Makassar and lead the Superteam campus club there. I built Commish's program, app and tests myself.</a:t>
+              <a:t>US affiliate spend alone is forecast at about fourteen billion dollars this year [S3], and Goldman Sachs counts fifty million creators worldwide [S4]. Our own plan is a one percent fee on each payout. If one percent of US affiliate spend settled through Commish, that's about 1.4 million dollars a year. Dollar stablecoins have had a US law behind them since July 2025 [S5].</a:t>
             </a:r>
             <a:endParaRPr lang="en-US" dirty="0"/>
           </a:p>
@@ -688,6 +689,94 @@
           <a:p>
             <a:r>
               <a:rPr lang="en-US" dirty="0"/>
+              <a:t>I'm Bryan Kwandou. I've sold my own art on Objkt since 2022 and on Drip since 2024, and I earn through Shutterstock and Upwork, so every payout I get runs on someone else's schedule. I study informatics in Makassar and lead the Superteam campus club there. I built Commish's program, app and tests myself.</a:t>
+            </a:r>
+            <a:endParaRPr lang="en-US" dirty="0"/>
+          </a:p>
+        </p:txBody>
+      </p:sp>
+      <p:sp>
+        <p:nvSpPr>
+          <p:cNvPr id="4" name="Slide Number Placeholder 3"/>
+          <p:cNvSpPr>
+            <a:spLocks noGrp="1"/>
+          </p:cNvSpPr>
+          <p:nvPr>
+            <p:ph type="sldNum" sz="quarter" idx="10"/>
+          </p:nvPr>
+        </p:nvSpPr>
+        <p:spPr/>
+        <p:txBody>
+          <a:bodyPr/>
+          <a:lstStyle/>
+          <a:p>
+            <a:fld id="{F7021451-1387-4CA6-816F-3879F97B5CBC}" type="slidenum">
+              <a:rPr lang="en-US"/>
+              <a:t>11</a:t>
+            </a:fld>
+            <a:endParaRPr lang="en-US"/>
+          </a:p>
+        </p:txBody>
+      </p:sp>
+    </p:spTree>
+    <p:extLst>
+      <p:ext uri="{BB962C8B-B14F-4D97-AF65-F5344CB8AC3E}">
+        <p14:creationId xmlns:p14="http://schemas.microsoft.com/office/powerpoint/2010/main" val="1024086991"/>
+      </p:ext>
+    </p:extLst>
+  </p:cSld>
+  <p:clrMapOvr>
+    <a:masterClrMapping/>
+  </p:clrMapOvr>
+</p:notes>
+</file>
+
+<file path=ppt/notesSlides/notesSlide12.xml><?xml version="1.0" encoding="utf-8"?>
+<p:notes xmlns:a="http://schemas.openxmlformats.org/drawingml/2006/main" xmlns:r="http://schemas.openxmlformats.org/officeDocument/2006/relationships" xmlns:p="http://schemas.openxmlformats.org/presentationml/2006/main">
+  <p:cSld>
+    <p:spTree>
+      <p:nvGrpSpPr>
+        <p:cNvPr id="1" name=""/>
+        <p:cNvGrpSpPr/>
+        <p:nvPr/>
+      </p:nvGrpSpPr>
+      <p:grpSpPr>
+        <a:xfrm>
+          <a:off x="0" y="0"/>
+          <a:ext cx="0" cy="0"/>
+          <a:chOff x="0" y="0"/>
+          <a:chExt cx="0" cy="0"/>
+        </a:xfrm>
+      </p:grpSpPr>
+      <p:sp>
+        <p:nvSpPr>
+          <p:cNvPr id="2" name="Slide Image Placeholder 1"/>
+          <p:cNvSpPr>
+            <a:spLocks noGrp="1" noRot="1" noChangeAspect="1"/>
+          </p:cNvSpPr>
+          <p:nvPr>
+            <p:ph type="sldImg"/>
+          </p:nvPr>
+        </p:nvSpPr>
+        <p:spPr/>
+      </p:sp>
+      <p:sp>
+        <p:nvSpPr>
+          <p:cNvPr id="3" name="Notes Placeholder 2"/>
+          <p:cNvSpPr>
+            <a:spLocks noGrp="1"/>
+          </p:cNvSpPr>
+          <p:nvPr>
+            <p:ph type="body" idx="1"/>
+          </p:nvPr>
+        </p:nvSpPr>
+        <p:spPr/>
+        <p:txBody>
+          <a:bodyPr/>
+          <a:lstStyle/>
+          <a:p>
+            <a:r>
+              <a:rPr lang="en-US" dirty="0"/>
               <a:t>Here's the plan. The program and the app are done. Next is the mainnet deploy and a first live campaign, then ten pilots with Solana apps that already pay creators and hold USDC. After that, an audit and a Shopify integration through order webhooks. If you run an affiliate program, try it at getcommish.vercel.app.</a:t>
             </a:r>
             <a:endParaRPr lang="en-US" dirty="0"/>
@@ -711,7 +800,7 @@
           <a:p>
             <a:fld id="{F7021451-1387-4CA6-816F-3879F97B5CBC}" type="slidenum">
               <a:rPr lang="en-US"/>
-              <a:t>11</a:t>
+              <a:t>12</a:t>
             </a:fld>
             <a:endParaRPr lang="en-US"/>
           </a:p>
@@ -1040,7 +1129,7 @@
           <a:p>
             <a:r>
               <a:rPr lang="en-US" dirty="0"/>
-              <a:t>Three steps. The attestor records the sale, and the program computes the cut, not the caller. The commission sits through the refund window. Then anyone can release it, the creator or a bot, and the money can only land in the payee's own USDC account. If this website went offline tomorrow, creators could still collect.</a:t>
+              <a:t>Why would a brand lock its own money? Because affiliates choose programs by whether they get paid. In a PerformanceIN survey of 3,200 affiliates in crypto, forex and gambling, 73 percent said payout reliability was their main reason to switch programs [S8]. A Commish campaign shows its reserved and paid totals on-chain, so a brand can prove it pays before a creator signs up.</a:t>
             </a:r>
             <a:endParaRPr lang="en-US" dirty="0"/>
           </a:p>
@@ -1128,7 +1217,7 @@
           <a:p>
             <a:r>
               <a:rPr lang="en-US" dirty="0"/>
-              <a:t>A pending commission is money owed on a known date, so it can be sold. Here the creator sells a twenty-five dollar commission for 24.25 and is paid right away. The buyer becomes the payee, collects the full amount at release, and takes over the refund risk. It all settles in one transaction.</a:t>
+              <a:t>Three steps. The attestor records the sale, and the program computes the cut, not the caller. The commission sits through the refund window. Then anyone can release it, the creator or a bot, and the money can only land in the payee's own USDC account. If this website went offline tomorrow, creators could still collect.</a:t>
             </a:r>
             <a:endParaRPr lang="en-US" dirty="0"/>
           </a:p>
@@ -1216,7 +1305,7 @@
           <a:p>
             <a:r>
               <a:rPr lang="en-US" dirty="0"/>
-              <a:t>All of it is one Solana program written with Pinocchio: 9,296 bytes, small enough that deploying it to mainnet costs under 0.05 SOL. Each rule here is checked on-chain, and the test suite has an attack for each one that has to fail. A transaction's base fee is 5,000 lamports per signature [S6], cheap enough to run for every order.</a:t>
+              <a:t>A pending commission is money owed on a known date, so it can be sold. Here the creator sells a twenty-five dollar commission for 24.25 and is paid right away. The buyer becomes the payee, collects the full amount at release, and takes over the refund risk. It all settles in one transaction.</a:t>
             </a:r>
             <a:endParaRPr lang="en-US" dirty="0"/>
           </a:p>
@@ -1304,7 +1393,7 @@
           <a:p>
             <a:r>
               <a:rPr lang="en-US" dirty="0"/>
-              <a:t>We checked before building. Colosseum's project search turns up eight earlier Solana affiliate or referral projects, and none placed [S7]. Three of them promised instant payouts, which no brand accepts while one online order in five comes back. Commish keeps the refund window brands already use, and guarantees the money inside it.</a:t>
+              <a:t>All of it is one Solana program written with Pinocchio: 9,296 bytes, small enough that deploying it to mainnet costs under 0.05 SOL. Each rule here is checked on-chain, and the test suite has an attack for each one that has to fail. A transaction's base fee is 5,000 lamports per signature [S6], cheap enough to run for every order.</a:t>
             </a:r>
             <a:endParaRPr lang="en-US" dirty="0"/>
           </a:p>
@@ -1392,7 +1481,7 @@
           <a:p>
             <a:r>
               <a:rPr lang="en-US" dirty="0"/>
-              <a:t>US affiliate spend alone is forecast at about fourteen billion dollars this year [S3], and Goldman Sachs counts fifty million creators worldwide [S4]. Our own plan is a one percent fee on each payout. If one percent of US affiliate spend settled through Commish, that's about 1.4 million dollars a year. Dollar stablecoins have had a US law behind them since July 2025 [S5].</a:t>
+              <a:t>We checked before building. Colosseum's project search turns up eight earlier Solana affiliate or referral projects, and none placed [S7]. Three of them promised instant payouts, which no brand accepts while one online order in five comes back. Commish keeps the refund window brands already use, and guarantees the money inside it.</a:t>
             </a:r>
             <a:endParaRPr lang="en-US" dirty="0"/>
           </a:p>
@@ -1842,6 +1931,55 @@
 <file path=ppt/slides/slide11.xml><?xml version="1.0" encoding="utf-8"?>
 <p:sld xmlns:a="http://schemas.openxmlformats.org/drawingml/2006/main" xmlns:r="http://schemas.openxmlformats.org/officeDocument/2006/relationships" xmlns:p="http://schemas.openxmlformats.org/presentationml/2006/main">
   <p:cSld name="Slide 11">
+    <p:spTree>
+      <p:nvGrpSpPr>
+        <p:cNvPr id="1" name=""/>
+        <p:cNvGrpSpPr/>
+        <p:nvPr/>
+      </p:nvGrpSpPr>
+      <p:grpSpPr>
+        <a:xfrm>
+          <a:off x="0" y="0"/>
+          <a:ext cx="0" cy="0"/>
+          <a:chOff x="0" y="0"/>
+          <a:chExt cx="0" cy="0"/>
+        </a:xfrm>
+      </p:grpSpPr>
+      <p:pic>
+        <p:nvPicPr>
+          <p:cNvPr id="2" name="Image 0" descr="preencoded.png">    </p:cNvPr>
+          <p:cNvPicPr>
+            <a:picLocks noChangeAspect="1"/>
+          </p:cNvPicPr>
+          <p:nvPr/>
+        </p:nvPicPr>
+        <p:blipFill>
+          <a:blip r:embed="rId1"/>
+          <a:stretch>
+            <a:fillRect/>
+          </a:stretch>
+        </p:blipFill>
+        <p:spPr>
+          <a:xfrm>
+            <a:off x="0" y="0"/>
+            <a:ext cx="12191695" cy="6858000"/>
+          </a:xfrm>
+          <a:prstGeom prst="rect">
+            <a:avLst/>
+          </a:prstGeom>
+        </p:spPr>
+      </p:pic>
+    </p:spTree>
+  </p:cSld>
+  <p:clrMapOvr>
+    <a:masterClrMapping/>
+  </p:clrMapOvr>
+</p:sld>
+</file>
+
+<file path=ppt/slides/slide12.xml><?xml version="1.0" encoding="utf-8"?>
+<p:sld xmlns:a="http://schemas.openxmlformats.org/drawingml/2006/main" xmlns:r="http://schemas.openxmlformats.org/officeDocument/2006/relationships" xmlns:p="http://schemas.openxmlformats.org/presentationml/2006/main">
+  <p:cSld name="Slide 12">
     <p:spTree>
       <p:nvGrpSpPr>
         <p:cNvPr id="1" name=""/>
